--- a/presentation/output/DivX-illustrated-v1.pptx
+++ b/presentation/output/DivX-illustrated-v1.pptx
@@ -2903,7 +2903,7 @@
                 <a:ea typeface="Helvetica Neue"/>
                 <a:cs typeface="Helvetica Neue"/>
               </a:rPr>
-              <a:t>DIVIDENDX FLOW</a:t>
+              <a:t>DIVX FLOW</a:t>
             </a:r>
           </a:p>
         </p:txBody>
